--- a/docs/USAMIS_Presentation.pptx
+++ b/docs/USAMIS_Presentation.pptx
@@ -4564,7 +4564,7 @@
                     <a:p>
                       <a:r>
                         <a:rPr sz="1100"/>
-                        <a:t>0.6709</a:t>
+                        <a:t>0.7573</a:t>
                       </a:r>
                     </a:p>
                   </a:txBody>
@@ -4605,7 +4605,7 @@
                     <a:p>
                       <a:r>
                         <a:rPr sz="1100"/>
-                        <a:t>5.8126 / 7.1903</a:t>
+                        <a:t>5.0688 / 6.3194</a:t>
                       </a:r>
                     </a:p>
                   </a:txBody>
@@ -4646,7 +4646,7 @@
                     <a:p>
                       <a:r>
                         <a:rPr sz="1100"/>
-                        <a:t>0.7741 / 0.8741 / 0.8211</a:t>
+                        <a:t>0.8185 / 0.9055 / 0.8598</a:t>
                       </a:r>
                     </a:p>
                   </a:txBody>
